--- a/decks/hist-british-empire-india/hist-british-empire-india_ch5_independence.pptx
+++ b/decks/hist-british-empire-india/hist-british-empire-india_ch5_independence.pptx
@@ -126,30 +126,30 @@
   <p:extLst>
     <p:ext uri="{521415D9-36F7-43E2-AB2F-B90AF26B5E84}">
       <p14:sectionLst xmlns:p14="http://schemas.microsoft.com/office/powerpoint/2010/main">
-        <p14:section name="Opening" id="{b8dc88c2-b72b-33e9-f9b7-773e478eec79}">
+        <p14:section name="Opening" id="{5a5c31be-132a-c911-d0fb-e6ed11a28975}">
           <p14:sldIdLst>
             <p14:sldId id="256"/>
           </p14:sldIdLst>
         </p14:section>
-        <p14:section name="Gate" id="{ad7fe652-6a50-6ace-7357-471f1cf8f6ab}">
+        <p14:section name="Gate" id="{e1a5c228-c040-8a3e-3769-e062d2b9ef0b}">
           <p14:sldIdLst>
             <p14:sldId id="257"/>
             <p14:sldId id="258"/>
           </p14:sldIdLst>
         </p14:section>
-        <p14:section name="Pre-teach" id="{4d38dac3-52ae-d19d-d746-c79214a01b1d}">
+        <p14:section name="Pre-teach" id="{5cc71621-63d2-f957-b458-a86827d05651}">
           <p14:sldIdLst>
             <p14:sldId id="259"/>
             <p14:sldId id="260"/>
           </p14:sldIdLst>
         </p14:section>
-        <p14:section name="Read-along" id="{955cba11-7264-07fa-f016-b280a0c38579}">
+        <p14:section name="Read-along" id="{7a524c1e-5a5b-74a7-a321-05e2b0286ebf}">
           <p14:sldIdLst>
             <p14:sldId id="261"/>
             <p14:sldId id="262"/>
           </p14:sldIdLst>
         </p14:section>
-        <p14:section name="Teach" id="{6aa257ff-d055-e3d3-0c5b-80ebf86015d3}">
+        <p14:section name="Teach" id="{55ef1722-88c1-78ee-de98-59da0c9f061e}">
           <p14:sldIdLst>
             <p14:sldId id="263"/>
             <p14:sldId id="264"/>
@@ -158,7 +158,7 @@
             <p14:sldId id="267"/>
           </p14:sldIdLst>
         </p14:section>
-        <p14:section name="Routes" id="{ef79facf-d16f-9624-4aa6-0baade95b166}">
+        <p14:section name="Routes" id="{f87dfd06-e500-37ad-cf52-a4e406c66fc5}">
           <p14:sldIdLst>
             <p14:sldId id="268"/>
             <p14:sldId id="269"/>
@@ -166,12 +166,12 @@
             <p14:sldId id="271"/>
           </p14:sldIdLst>
         </p14:section>
-        <p14:section name="Close" id="{8e30b946-409b-e973-2aec-2130208003dd}">
+        <p14:section name="Close" id="{4140b19b-fe23-6b41-982c-d8663702a35a}">
           <p14:sldIdLst>
             <p14:sldId id="272"/>
           </p14:sldIdLst>
         </p14:section>
-        <p14:section name="Answers" id="{1123f110-7b66-93d1-fbb4-77bc9b42dc5c}">
+        <p14:section name="Answers" id="{de6c1834-f6dc-0514-edb7-263b5ef77d38}">
           <p14:sldIdLst>
             <p14:sldId id="273"/>
             <p14:sldId id="274"/>
@@ -860,7 +860,7 @@
             <a:r>
               <a:rPr lang="en-US" dirty="0"/>
               <a:t>Teach — Independence and partition, 1947. Say it in your own words, then check understanding with a quick question: ask a pupil from the pre-teach group first, since they met these words and ideas before the lesson. Pupils try to recall before you re-explain.
-By the end of the war, India and many other British colonies were demanding the right to rule themselves. Britain no longer had the military strength or the wealth to hold on to them, and many British people felt that rebuilding Britain mattered far more than keeping distant colonies. By 1946 the British government had agreed that India would become independent.
+By the end of the war, India and many other British colonies were demanding the right to rule themselves. Britain no longer had the soldiers or the money to hold on to them, and many British people felt that rebuilding Britain at home mattered far more than keeping colonies far away. By 1946 the British government had agreed that India would become independent.
 In 1947 India became independent. But the country was partitioned, split into two: India, with a Hindu majority, and a new country for Muslims, Pakistan, as the Muslim League had demanded. Your lesson's video asks how the British had categorised Indians by religion and why that was a problem. Partition meant that enormous numbers of people had to leave their homes to cross the new border, and terrible violence broke out between religious groups.
 Your plenary lists the impacts of the end of the Raj: independence was granted; India was partitioned; there was violence between religious groups; and a long-term conflict began over Kashmir, a region both new countries claimed. Divide and rule had helped Britain hold India for almost two centuries. Its legacy was a divided subcontinent.
 Tip: When you write about 1947, give both sides: independence was a victory for the movement, and partition was a disaster for millions of ordinary people.</a:t>
@@ -2353,7 +2353,7 @@
               <a:rPr lang="en-US" dirty="0"/>
               <a:t>Teach — Gandhi and the Salt March. Say it in your own words, then check understanding with a quick question: ask a pupil from the pre-teach group first, since they met these words and ideas before the lesson. Pupils try to recall before you re-explain.
 In the 1920s the independence movement gained support under Mohandas Gandhi, a Hindu and a former lawyer. He believed independence could be won through non-violent protest, which today is often called passive resistance. Gandhi called it satyagraha, which roughly means truth force. Leaders who came later, among them Martin Luther King and Nelson Mandela, took up his ideas.
-The most famous protest was the Salt March of 1930. Indians were not allowed to make their own salt; they had to buy it, and the British government taxed it heavily. Gandhi and 78 leaders of the independence movement led thousands of protesters on a march to the sea, and there they made their own salt out of the seawater. Across India, thousands copied them, and around 60,000 people were arrested, including Gandhi himself.
+The most famous protest was the Salt March of 1930. Indians were forbidden to make their own salt: they had to buy it, and the British government taxed it heavily. Gandhi and 78 leaders of the independence movement led thousands of protesters on a march to the sea, and there they made their own salt out of the seawater. Across India, thousands copied them, and around 60,000 people were arrested, including Gandhi himself.
 The march worked in a way the British had not expected. After Gandhi was released from prison, the British accepted that they could no longer brush the demand for independence aside, and they invited him to London to speak there for the Indian National Congress. A protest about salt had put independence on the table.
 Tip: Link the Salt March back to Swadeshi: boycotting British salt from Cheshire in 1905 became making Indian salt from seawater in 1930. The method grew.</a:t>
             </a:r>
